--- a/MP2526_INF_poster_Gielkens.pptx
+++ b/MP2526_INF_poster_Gielkens.pptx
@@ -2016,12 +2016,12 @@
             <a:t> </a:t>
           </a:r>
           <a:r>
-            <a:rPr lang="nl-BE" sz="2000" b="1" dirty="0" err="1">
+            <a:rPr lang="nl-BE" sz="2000" b="1" dirty="0">
               <a:solidFill>
                 <a:srgbClr val="003D77"/>
               </a:solidFill>
             </a:rPr>
-            <a:t>scoreert</a:t>
+            <a:t>scoort</a:t>
           </a:r>
           <a:r>
             <a:rPr lang="nl-BE" sz="2000" dirty="0"/>
@@ -2406,7 +2406,7 @@
                 <a:srgbClr val="003D77"/>
               </a:solidFill>
             </a:rPr>
-            <a:t> rating sortering</a:t>
+            <a:t> rating-sortering</a:t>
           </a:r>
           <a:r>
             <a:rPr lang="nl-BE" sz="2000" dirty="0">
@@ -2426,7 +2426,7 @@
           </a:r>
           <a:r>
             <a:rPr lang="nl-BE" sz="2000" dirty="0"/>
-            <a:t> categorieën voor snelle navigatie en prioritering. Figuur 6 geeft de ingeklapte status sortering weer.</a:t>
+            <a:t>-categorieën voor snelle navigatie en prioritering. Figuur 6 geeft de ingeklapte statussortering weer.</a:t>
           </a:r>
         </a:p>
       </dgm:t>
@@ -2805,12 +2805,12 @@
             <a:t> </a:t>
           </a:r>
           <a:r>
-            <a:rPr lang="nl-BE" sz="2000" b="1" kern="1200" dirty="0" err="1">
+            <a:rPr lang="nl-BE" sz="2000" b="1" kern="1200" dirty="0">
               <a:solidFill>
                 <a:srgbClr val="003D77"/>
               </a:solidFill>
             </a:rPr>
-            <a:t>scoreert</a:t>
+            <a:t>scoort</a:t>
           </a:r>
           <a:r>
             <a:rPr lang="nl-BE" sz="2000" kern="1200" dirty="0"/>
@@ -3143,7 +3143,7 @@
                 <a:srgbClr val="003D77"/>
               </a:solidFill>
             </a:rPr>
-            <a:t> rating sortering</a:t>
+            <a:t> rating-sortering</a:t>
           </a:r>
           <a:r>
             <a:rPr lang="nl-BE" sz="2000" kern="1200" dirty="0">
@@ -3163,7 +3163,7 @@
           </a:r>
           <a:r>
             <a:rPr lang="nl-BE" sz="2000" kern="1200" dirty="0"/>
-            <a:t> categorieën voor snelle navigatie en prioritering. Figuur 6 geeft de ingeklapte status sortering weer.</a:t>
+            <a:t>-categorieën voor snelle navigatie en prioritering. Figuur 6 geeft de ingeklapte statussortering weer.</a:t>
           </a:r>
         </a:p>
       </dsp:txBody>
@@ -5859,7 +5859,7 @@
           <a:p>
             <a:fld id="{A5A46936-730D-204E-AB52-3BEB64B90A85}" type="datetimeFigureOut">
               <a:rPr lang="nl-NL" smtClean="0"/>
-              <a:t>8-12-2025</a:t>
+              <a:t>18-1-2026</a:t>
             </a:fld>
             <a:endParaRPr lang="nl-NL"/>
           </a:p>
@@ -6024,7 +6024,7 @@
           <a:p>
             <a:fld id="{97349249-6D1C-0748-B1D9-2AF3A057365D}" type="datetimeFigureOut">
               <a:rPr lang="nl-NL" smtClean="0"/>
-              <a:t>8-12-2025</a:t>
+              <a:t>18-1-2026</a:t>
             </a:fld>
             <a:endParaRPr lang="nl-NL"/>
           </a:p>
@@ -7187,7 +7187,7 @@
           <a:p>
             <a:fld id="{A72B7129-FE34-674B-A2EC-97FC337DE4A7}" type="datetimeFigureOut">
               <a:rPr lang="nl-NL" smtClean="0"/>
-              <a:t>8-12-2025</a:t>
+              <a:t>18-1-2026</a:t>
             </a:fld>
             <a:endParaRPr lang="nl-NL"/>
           </a:p>
@@ -7668,7 +7668,7 @@
         </p:nvSpPr>
         <p:spPr>
           <a:xfrm>
-            <a:off x="471822" y="21122980"/>
+            <a:off x="471822" y="21074855"/>
             <a:ext cx="20314040" cy="3953709"/>
           </a:xfrm>
           <a:prstGeom prst="roundRect">
@@ -7906,18 +7906,82 @@
           <a:bodyPr rtlCol="0" anchor="ctr"/>
           <a:lstStyle/>
           <a:p>
-            <a:pPr algn="ctr">
+            <a:pPr>
               <a:spcAft>
                 <a:spcPts val="1000"/>
               </a:spcAft>
             </a:pPr>
             <a:r>
+              <a:rPr lang="nl-BE" sz="2000" b="1" i="1" dirty="0" err="1">
+                <a:solidFill>
+                  <a:srgbClr val="E73B2B"/>
+                </a:solidFill>
+              </a:rPr>
+              <a:t>Threat</a:t>
+            </a:r>
+            <a:r>
+              <a:rPr lang="nl-BE" sz="2000" b="1" i="1" dirty="0">
+                <a:solidFill>
+                  <a:srgbClr val="E73B2B"/>
+                </a:solidFill>
+              </a:rPr>
+              <a:t> </a:t>
+            </a:r>
+            <a:r>
+              <a:rPr lang="nl-BE" sz="2000" b="1" i="1" dirty="0" err="1">
+                <a:solidFill>
+                  <a:srgbClr val="E73B2B"/>
+                </a:solidFill>
+              </a:rPr>
+              <a:t>modeling</a:t>
+            </a:r>
+            <a:r>
+              <a:rPr lang="nl-BE" sz="2000" b="1" i="1" dirty="0">
+                <a:solidFill>
+                  <a:srgbClr val="E73B2B"/>
+                </a:solidFill>
+              </a:rPr>
+              <a:t> </a:t>
+            </a:r>
+            <a:r>
+              <a:rPr lang="nl-BE" sz="2000" dirty="0">
+                <a:solidFill>
+                  <a:schemeClr val="tx1"/>
+                </a:solidFill>
+              </a:rPr>
+              <a:t>is essentieel maar complex voor ontwikkelaars zonder securitykennis, waardoor </a:t>
+            </a:r>
+            <a:r>
+              <a:rPr lang="nl-BE" sz="2000" b="1" dirty="0">
+                <a:solidFill>
+                  <a:srgbClr val="E73B2B"/>
+                </a:solidFill>
+              </a:rPr>
+              <a:t>risicoanalyses</a:t>
+            </a:r>
+            <a:r>
+              <a:rPr lang="nl-BE" sz="2000" dirty="0">
+                <a:solidFill>
+                  <a:schemeClr val="tx1"/>
+                </a:solidFill>
+              </a:rPr>
+              <a:t> vaak onvolledig blijven [1]. Dit onderzoek ontwikkelt daarom een </a:t>
+            </a:r>
+            <a:r>
+              <a:rPr lang="nl-BE" sz="2000" b="1" dirty="0">
+                <a:solidFill>
+                  <a:srgbClr val="E73B2B"/>
+                </a:solidFill>
+              </a:rPr>
+              <a:t>gebruiksvriendelijke </a:t>
+            </a:r>
+            <a:r>
               <a:rPr lang="nl-BE" sz="2000" b="1" dirty="0" err="1">
                 <a:solidFill>
                   <a:srgbClr val="E73B2B"/>
                 </a:solidFill>
               </a:rPr>
-              <a:t>Threat</a:t>
+              <a:t>webtool</a:t>
             </a:r>
             <a:r>
               <a:rPr lang="nl-BE" sz="2000" b="1" dirty="0">
@@ -7928,28 +7992,172 @@
               <a:t> </a:t>
             </a:r>
             <a:r>
+              <a:rPr lang="nl-BE" sz="2000" dirty="0">
+                <a:solidFill>
+                  <a:schemeClr val="tx1"/>
+                </a:solidFill>
+              </a:rPr>
+              <a:t>gebaseerd op de </a:t>
+            </a:r>
+            <a:r>
               <a:rPr lang="nl-BE" sz="2000" b="1" dirty="0" err="1">
                 <a:solidFill>
                   <a:srgbClr val="E73B2B"/>
                 </a:solidFill>
               </a:rPr>
+              <a:t>fortunately</a:t>
+            </a:r>
+            <a:r>
+              <a:rPr lang="nl-BE" sz="2000" b="1" dirty="0">
+                <a:solidFill>
+                  <a:srgbClr val="E73B2B"/>
+                </a:solidFill>
+              </a:rPr>
+              <a:t>–</a:t>
+            </a:r>
+            <a:r>
+              <a:rPr lang="nl-BE" sz="2000" b="1" dirty="0" err="1">
+                <a:solidFill>
+                  <a:srgbClr val="E73B2B"/>
+                </a:solidFill>
+              </a:rPr>
+              <a:t>unfortunately</a:t>
+            </a:r>
+            <a:r>
+              <a:rPr lang="nl-BE" sz="2000" b="1" dirty="0">
+                <a:solidFill>
+                  <a:srgbClr val="E73B2B"/>
+                </a:solidFill>
+              </a:rPr>
+              <a:t> methode</a:t>
+            </a:r>
+            <a:r>
+              <a:rPr lang="nl-BE" sz="2000" dirty="0">
+                <a:solidFill>
+                  <a:schemeClr val="tx1"/>
+                </a:solidFill>
+              </a:rPr>
+              <a:t>: een intuïtieve boomstructuur waarin dreigingen ("</a:t>
+            </a:r>
+            <a:r>
+              <a:rPr lang="nl-BE" sz="2000" dirty="0" err="1">
+                <a:solidFill>
+                  <a:schemeClr val="tx1"/>
+                </a:solidFill>
+              </a:rPr>
+              <a:t>unfortunately</a:t>
+            </a:r>
+            <a:r>
+              <a:rPr lang="nl-BE" sz="2000" dirty="0">
+                <a:solidFill>
+                  <a:schemeClr val="tx1"/>
+                </a:solidFill>
+              </a:rPr>
+              <a:t>", rood) afwisselen met tegenmaatregelen ("</a:t>
+            </a:r>
+            <a:r>
+              <a:rPr lang="nl-BE" sz="2000" dirty="0" err="1">
+                <a:solidFill>
+                  <a:schemeClr val="tx1"/>
+                </a:solidFill>
+              </a:rPr>
+              <a:t>fortunately</a:t>
+            </a:r>
+            <a:r>
+              <a:rPr lang="nl-BE" sz="2000" dirty="0">
+                <a:solidFill>
+                  <a:schemeClr val="tx1"/>
+                </a:solidFill>
+              </a:rPr>
+              <a:t>", groen). Het doel van dit onderzoek is een </a:t>
+            </a:r>
+            <a:r>
+              <a:rPr lang="nl-BE" sz="2000" dirty="0" err="1">
+                <a:solidFill>
+                  <a:schemeClr val="tx1"/>
+                </a:solidFill>
+              </a:rPr>
+              <a:t>proof</a:t>
+            </a:r>
+            <a:r>
+              <a:rPr lang="nl-BE" sz="2000" dirty="0">
+                <a:solidFill>
+                  <a:schemeClr val="tx1"/>
+                </a:solidFill>
+              </a:rPr>
+              <a:t>-of-concept tool ontwerpen, implementeren en evalueren die </a:t>
+            </a:r>
+            <a:r>
+              <a:rPr lang="nl-BE" sz="2000" dirty="0" err="1">
+                <a:solidFill>
+                  <a:schemeClr val="tx1"/>
+                </a:solidFill>
+              </a:rPr>
+              <a:t>threat</a:t>
+            </a:r>
+            <a:r>
+              <a:rPr lang="nl-BE" sz="2000" dirty="0">
+                <a:solidFill>
+                  <a:schemeClr val="tx1"/>
+                </a:solidFill>
+              </a:rPr>
+              <a:t> </a:t>
+            </a:r>
+            <a:r>
+              <a:rPr lang="nl-BE" sz="2000" dirty="0" err="1">
+                <a:solidFill>
+                  <a:schemeClr val="tx1"/>
+                </a:solidFill>
+              </a:rPr>
               <a:t>modeling</a:t>
             </a:r>
             <a:r>
+              <a:rPr lang="nl-BE" sz="2000" dirty="0">
+                <a:solidFill>
+                  <a:schemeClr val="tx1"/>
+                </a:solidFill>
+              </a:rPr>
+              <a:t> </a:t>
+            </a:r>
+            <a:r>
               <a:rPr lang="nl-BE" sz="2000" b="1" dirty="0">
                 <a:solidFill>
                   <a:srgbClr val="E73B2B"/>
                 </a:solidFill>
               </a:rPr>
+              <a:t>toegankelijker</a:t>
+            </a:r>
+            <a:r>
+              <a:rPr lang="nl-BE" sz="2000" dirty="0">
+                <a:solidFill>
+                  <a:schemeClr val="tx1"/>
+                </a:solidFill>
+              </a:rPr>
+              <a:t>,</a:t>
+            </a:r>
+            <a:r>
+              <a:rPr lang="nl-BE" sz="2000" dirty="0">
+                <a:solidFill>
+                  <a:srgbClr val="E73B2B"/>
+                </a:solidFill>
+              </a:rPr>
               <a:t> </a:t>
             </a:r>
             <a:r>
+              <a:rPr lang="nl-BE" sz="2000" b="1" dirty="0">
+                <a:solidFill>
+                  <a:srgbClr val="E73B2B"/>
+                </a:solidFill>
+              </a:rPr>
+              <a:t>overzichtelijker</a:t>
+            </a:r>
+            <a:r>
               <a:rPr lang="nl-BE" sz="2000" dirty="0">
                 <a:solidFill>
                   <a:schemeClr val="tx1"/>
                 </a:solidFill>
               </a:rPr>
-              <a:t>is essentieel maar complex voor ontwikkelaars zonder securitykennis, waardoor </a:t>
+              <a:t> en </a:t>
             </a:r>
             <a:r>
               <a:rPr lang="nl-BE" sz="2000" b="1" dirty="0">
@@ -7957,7 +8165,7 @@
                   <a:srgbClr val="E73B2B"/>
                 </a:solidFill>
               </a:rPr>
-              <a:t>risicoanalyses</a:t>
+              <a:t>effectiever</a:t>
             </a:r>
             <a:r>
               <a:rPr lang="nl-BE" sz="2000" dirty="0">
@@ -7965,219 +8173,11 @@
                   <a:schemeClr val="tx1"/>
                 </a:solidFill>
               </a:rPr>
-              <a:t> vaak onvolledig blijven [1]. Dit onderzoek ontwikkelt daarom een </a:t>
-            </a:r>
-            <a:r>
-              <a:rPr lang="nl-BE" sz="2000" b="1" dirty="0">
-                <a:solidFill>
-                  <a:srgbClr val="E73B2B"/>
-                </a:solidFill>
-              </a:rPr>
-              <a:t>gebruiksvriendelijke </a:t>
-            </a:r>
-            <a:r>
-              <a:rPr lang="nl-BE" sz="2000" b="1" dirty="0" err="1">
-                <a:solidFill>
-                  <a:srgbClr val="E73B2B"/>
-                </a:solidFill>
-              </a:rPr>
-              <a:t>webtool</a:t>
-            </a:r>
-            <a:r>
-              <a:rPr lang="nl-BE" sz="2000" b="1" dirty="0">
-                <a:solidFill>
-                  <a:srgbClr val="E73B2B"/>
-                </a:solidFill>
-              </a:rPr>
-              <a:t> </a:t>
-            </a:r>
-            <a:r>
-              <a:rPr lang="nl-BE" sz="2000" dirty="0">
-                <a:solidFill>
-                  <a:schemeClr val="tx1"/>
-                </a:solidFill>
-              </a:rPr>
-              <a:t>gebaseerd op de </a:t>
-            </a:r>
-            <a:r>
-              <a:rPr lang="nl-BE" sz="2000" b="1" dirty="0" err="1">
-                <a:solidFill>
-                  <a:srgbClr val="E73B2B"/>
-                </a:solidFill>
-              </a:rPr>
-              <a:t>Fortunately</a:t>
-            </a:r>
-            <a:r>
-              <a:rPr lang="nl-BE" sz="2000" b="1" dirty="0">
-                <a:solidFill>
-                  <a:srgbClr val="E73B2B"/>
-                </a:solidFill>
-              </a:rPr>
-              <a:t>–</a:t>
-            </a:r>
-            <a:r>
-              <a:rPr lang="nl-BE" sz="2000" b="1" dirty="0" err="1">
-                <a:solidFill>
-                  <a:srgbClr val="E73B2B"/>
-                </a:solidFill>
-              </a:rPr>
-              <a:t>Unfortunately</a:t>
-            </a:r>
-            <a:r>
-              <a:rPr lang="nl-BE" sz="2000" b="1" dirty="0">
-                <a:solidFill>
-                  <a:srgbClr val="E73B2B"/>
-                </a:solidFill>
-              </a:rPr>
-              <a:t>-methode</a:t>
-            </a:r>
-            <a:r>
-              <a:rPr lang="nl-BE" sz="2000" dirty="0">
-                <a:solidFill>
-                  <a:schemeClr val="tx1"/>
-                </a:solidFill>
-              </a:rPr>
-              <a:t>: een intuïtieve boomstructuur waarin dreigingen ("</a:t>
-            </a:r>
-            <a:r>
-              <a:rPr lang="nl-BE" sz="2000" dirty="0" err="1">
-                <a:solidFill>
-                  <a:schemeClr val="tx1"/>
-                </a:solidFill>
-              </a:rPr>
-              <a:t>unfortunately</a:t>
-            </a:r>
-            <a:r>
-              <a:rPr lang="nl-BE" sz="2000" dirty="0">
-                <a:solidFill>
-                  <a:schemeClr val="tx1"/>
-                </a:solidFill>
-              </a:rPr>
-              <a:t>", rood) afwisselen met tegenmaatregelen ("</a:t>
-            </a:r>
-            <a:r>
-              <a:rPr lang="nl-BE" sz="2000" dirty="0" err="1">
-                <a:solidFill>
-                  <a:schemeClr val="tx1"/>
-                </a:solidFill>
-              </a:rPr>
-              <a:t>fortunately</a:t>
-            </a:r>
-            <a:r>
-              <a:rPr lang="nl-BE" sz="2000" dirty="0">
-                <a:solidFill>
-                  <a:schemeClr val="tx1"/>
-                </a:solidFill>
-              </a:rPr>
-              <a:t>", groen). Het doel van dit onderzoek is een </a:t>
-            </a:r>
-            <a:r>
-              <a:rPr lang="nl-BE" sz="2000" dirty="0" err="1">
-                <a:solidFill>
-                  <a:schemeClr val="tx1"/>
-                </a:solidFill>
-              </a:rPr>
-              <a:t>proof</a:t>
-            </a:r>
-            <a:r>
-              <a:rPr lang="nl-BE" sz="2000" dirty="0">
-                <a:solidFill>
-                  <a:schemeClr val="tx1"/>
-                </a:solidFill>
-              </a:rPr>
-              <a:t>-of-concept tool ontwerpen, implementeren en evalueren die </a:t>
-            </a:r>
-            <a:r>
-              <a:rPr lang="nl-BE" sz="2000" dirty="0" err="1">
-                <a:solidFill>
-                  <a:schemeClr val="tx1"/>
-                </a:solidFill>
-              </a:rPr>
-              <a:t>threat</a:t>
-            </a:r>
-            <a:r>
-              <a:rPr lang="nl-BE" sz="2000" dirty="0">
-                <a:solidFill>
-                  <a:schemeClr val="tx1"/>
-                </a:solidFill>
-              </a:rPr>
-              <a:t> </a:t>
-            </a:r>
-            <a:r>
-              <a:rPr lang="nl-BE" sz="2000" dirty="0" err="1">
-                <a:solidFill>
-                  <a:schemeClr val="tx1"/>
-                </a:solidFill>
-              </a:rPr>
-              <a:t>modeling</a:t>
-            </a:r>
-            <a:r>
-              <a:rPr lang="nl-BE" sz="2000" dirty="0">
-                <a:solidFill>
-                  <a:schemeClr val="tx1"/>
-                </a:solidFill>
-              </a:rPr>
-              <a:t> </a:t>
-            </a:r>
-            <a:r>
-              <a:rPr lang="nl-BE" sz="2000" b="1" dirty="0">
-                <a:solidFill>
-                  <a:srgbClr val="E73B2B"/>
-                </a:solidFill>
-              </a:rPr>
-              <a:t>toegankelijker</a:t>
-            </a:r>
-            <a:r>
-              <a:rPr lang="nl-BE" sz="2000" dirty="0">
-                <a:solidFill>
-                  <a:schemeClr val="tx1"/>
-                </a:solidFill>
-              </a:rPr>
-              <a:t>,</a:t>
-            </a:r>
-            <a:r>
-              <a:rPr lang="nl-BE" sz="2000" dirty="0">
-                <a:solidFill>
-                  <a:srgbClr val="E73B2B"/>
-                </a:solidFill>
-              </a:rPr>
-              <a:t> </a:t>
-            </a:r>
-            <a:r>
-              <a:rPr lang="nl-BE" sz="2000" b="1" dirty="0">
-                <a:solidFill>
-                  <a:srgbClr val="E73B2B"/>
-                </a:solidFill>
-              </a:rPr>
-              <a:t>overzichtelijker</a:t>
-            </a:r>
-            <a:r>
-              <a:rPr lang="nl-BE" sz="2000" dirty="0">
-                <a:solidFill>
-                  <a:schemeClr val="tx1"/>
-                </a:solidFill>
-              </a:rPr>
-              <a:t> en </a:t>
-            </a:r>
-            <a:r>
-              <a:rPr lang="nl-BE" sz="2000" b="1" dirty="0">
-                <a:solidFill>
-                  <a:srgbClr val="E73B2B"/>
-                </a:solidFill>
-              </a:rPr>
-              <a:t>effectiever</a:t>
-            </a:r>
-            <a:r>
-              <a:rPr lang="nl-BE" sz="2000" dirty="0">
-                <a:solidFill>
-                  <a:schemeClr val="tx1"/>
-                </a:solidFill>
-              </a:rPr>
-              <a:t> maakt voor niet-experts, met bijdragen aan zowel onderwijs als praktijk.</a:t>
+              <a:t> maakt voor niet-experts.</a:t>
             </a:r>
           </a:p>
           <a:p>
-            <a:pPr algn="ctr">
+            <a:pPr>
               <a:spcAft>
                 <a:spcPts val="600"/>
               </a:spcAft>
@@ -8192,52 +8192,263 @@
             </a:r>
           </a:p>
           <a:p>
-            <a:pPr algn="ctr">
+            <a:pPr marL="457200" indent="-457200">
               <a:spcAft>
                 <a:spcPts val="600"/>
               </a:spcAft>
+              <a:buFont typeface="+mj-lt"/>
+              <a:buAutoNum type="arabicPeriod"/>
             </a:pPr>
-            <a:endParaRPr lang="nl-BE" sz="1100" dirty="0">
-              <a:solidFill>
-                <a:schemeClr val="tx1"/>
-              </a:solidFill>
-            </a:endParaRPr>
+            <a:r>
+              <a:rPr lang="nl-BE" sz="2000" dirty="0">
+                <a:solidFill>
+                  <a:schemeClr val="tx1"/>
+                </a:solidFill>
+              </a:rPr>
+              <a:t>Welke </a:t>
+            </a:r>
+            <a:r>
+              <a:rPr lang="nl-BE" sz="2000" b="1" dirty="0">
+                <a:solidFill>
+                  <a:srgbClr val="E73B2A"/>
+                </a:solidFill>
+              </a:rPr>
+              <a:t>minimale basisfunctionaliteit </a:t>
+            </a:r>
+            <a:r>
+              <a:rPr lang="nl-BE" sz="2000" dirty="0">
+                <a:solidFill>
+                  <a:schemeClr val="tx1"/>
+                </a:solidFill>
+              </a:rPr>
+              <a:t>is nodig om </a:t>
+            </a:r>
+            <a:r>
+              <a:rPr lang="nl-BE" sz="2000" dirty="0" err="1">
+                <a:solidFill>
+                  <a:schemeClr val="tx1"/>
+                </a:solidFill>
+              </a:rPr>
+              <a:t>threat</a:t>
+            </a:r>
+            <a:r>
+              <a:rPr lang="nl-BE" sz="2000" dirty="0">
+                <a:solidFill>
+                  <a:schemeClr val="tx1"/>
+                </a:solidFill>
+              </a:rPr>
+              <a:t> </a:t>
+            </a:r>
+            <a:r>
+              <a:rPr lang="nl-BE" sz="2000" dirty="0" err="1">
+                <a:solidFill>
+                  <a:schemeClr val="tx1"/>
+                </a:solidFill>
+              </a:rPr>
+              <a:t>modeling</a:t>
+            </a:r>
+            <a:r>
+              <a:rPr lang="nl-BE" sz="2000" dirty="0">
+                <a:solidFill>
+                  <a:schemeClr val="tx1"/>
+                </a:solidFill>
+              </a:rPr>
+              <a:t> met </a:t>
+            </a:r>
+            <a:r>
+              <a:rPr lang="nl-BE" sz="2000" dirty="0" err="1">
+                <a:solidFill>
+                  <a:schemeClr val="tx1"/>
+                </a:solidFill>
+              </a:rPr>
+              <a:t>Fortunately-Unfortunately</a:t>
+            </a:r>
+            <a:r>
+              <a:rPr lang="nl-BE" sz="2000" dirty="0">
+                <a:solidFill>
+                  <a:schemeClr val="tx1"/>
+                </a:solidFill>
+              </a:rPr>
+              <a:t> trees te ondersteunen?</a:t>
+            </a:r>
           </a:p>
           <a:p>
-            <a:pPr algn="ctr">
+            <a:pPr marL="457200" indent="-457200">
               <a:spcAft>
                 <a:spcPts val="600"/>
               </a:spcAft>
+              <a:buFont typeface="+mj-lt"/>
+              <a:buAutoNum type="arabicPeriod"/>
             </a:pPr>
-            <a:endParaRPr lang="nl-BE" sz="2000" dirty="0">
-              <a:solidFill>
-                <a:schemeClr val="tx1"/>
-              </a:solidFill>
-            </a:endParaRPr>
+            <a:r>
+              <a:rPr lang="nl-BE" sz="2000" dirty="0">
+                <a:solidFill>
+                  <a:schemeClr val="tx1"/>
+                </a:solidFill>
+              </a:rPr>
+              <a:t>Welke </a:t>
+            </a:r>
+            <a:r>
+              <a:rPr lang="nl-BE" sz="2000" b="1" dirty="0">
+                <a:solidFill>
+                  <a:srgbClr val="E73B2A"/>
+                </a:solidFill>
+              </a:rPr>
+              <a:t>functies</a:t>
+            </a:r>
+            <a:r>
+              <a:rPr lang="nl-BE" sz="2000" dirty="0">
+                <a:solidFill>
+                  <a:schemeClr val="tx1"/>
+                </a:solidFill>
+              </a:rPr>
+              <a:t> worden als </a:t>
+            </a:r>
+            <a:r>
+              <a:rPr lang="nl-BE" sz="2000" b="1" dirty="0">
+                <a:solidFill>
+                  <a:srgbClr val="E73B2A"/>
+                </a:solidFill>
+              </a:rPr>
+              <a:t>meest nuttig </a:t>
+            </a:r>
+            <a:r>
+              <a:rPr lang="nl-BE" sz="2000" dirty="0">
+                <a:solidFill>
+                  <a:schemeClr val="tx1"/>
+                </a:solidFill>
+              </a:rPr>
+              <a:t>ervaren?</a:t>
+            </a:r>
           </a:p>
           <a:p>
-            <a:pPr algn="ctr">
+            <a:pPr marL="457200" indent="-457200">
               <a:spcAft>
                 <a:spcPts val="600"/>
               </a:spcAft>
+              <a:buFont typeface="+mj-lt"/>
+              <a:buAutoNum type="arabicPeriod"/>
             </a:pPr>
-            <a:endParaRPr lang="nl-BE" sz="2000" dirty="0">
-              <a:solidFill>
-                <a:schemeClr val="tx1"/>
-              </a:solidFill>
-            </a:endParaRPr>
-          </a:p>
-          <a:p>
-            <a:pPr algn="ctr">
-              <a:spcAft>
-                <a:spcPts val="600"/>
-              </a:spcAft>
-            </a:pPr>
-            <a:endParaRPr lang="nl-BE" sz="2000" dirty="0">
-              <a:solidFill>
-                <a:schemeClr val="tx1"/>
-              </a:solidFill>
-            </a:endParaRPr>
+            <a:r>
+              <a:rPr lang="nl-BE" sz="2000" dirty="0">
+                <a:solidFill>
+                  <a:schemeClr val="tx1"/>
+                </a:solidFill>
+              </a:rPr>
+              <a:t>Hoe</a:t>
+            </a:r>
+            <a:r>
+              <a:rPr lang="nl-BE" sz="2000" b="1" dirty="0">
+                <a:solidFill>
+                  <a:srgbClr val="E73B2A"/>
+                </a:solidFill>
+              </a:rPr>
+              <a:t> verhoudt </a:t>
+            </a:r>
+            <a:r>
+              <a:rPr lang="nl-BE" sz="2000" dirty="0">
+                <a:solidFill>
+                  <a:schemeClr val="tx1"/>
+                </a:solidFill>
+              </a:rPr>
+              <a:t>de voorgestelde </a:t>
+            </a:r>
+            <a:r>
+              <a:rPr lang="nl-BE" sz="2000" b="1" dirty="0">
+                <a:solidFill>
+                  <a:srgbClr val="E73B2A"/>
+                </a:solidFill>
+              </a:rPr>
+              <a:t>tool</a:t>
+            </a:r>
+            <a:r>
+              <a:rPr lang="nl-BE" sz="2000" dirty="0">
+                <a:solidFill>
+                  <a:schemeClr val="tx1"/>
+                </a:solidFill>
+              </a:rPr>
+              <a:t> zich </a:t>
+            </a:r>
+            <a:r>
+              <a:rPr lang="nl-BE" sz="2000" b="1" dirty="0">
+                <a:solidFill>
+                  <a:srgbClr val="E73B2A"/>
+                </a:solidFill>
+              </a:rPr>
+              <a:t>qua</a:t>
+            </a:r>
+            <a:r>
+              <a:rPr lang="nl-BE" sz="2000" b="1" dirty="0">
+                <a:solidFill>
+                  <a:schemeClr val="tx1"/>
+                </a:solidFill>
+              </a:rPr>
+              <a:t> </a:t>
+            </a:r>
+            <a:r>
+              <a:rPr lang="nl-BE" sz="2000" b="1" dirty="0">
+                <a:solidFill>
+                  <a:srgbClr val="E73B2A"/>
+                </a:solidFill>
+              </a:rPr>
+              <a:t>gebruiksvriendelijkheid</a:t>
+            </a:r>
+            <a:r>
+              <a:rPr lang="nl-BE" sz="2000" dirty="0">
+                <a:solidFill>
+                  <a:schemeClr val="tx1"/>
+                </a:solidFill>
+              </a:rPr>
+              <a:t> en </a:t>
+            </a:r>
+            <a:r>
+              <a:rPr lang="nl-BE" sz="2000" b="1" dirty="0">
+                <a:solidFill>
+                  <a:srgbClr val="E73B2A"/>
+                </a:solidFill>
+              </a:rPr>
+              <a:t>effectiviteit</a:t>
+            </a:r>
+            <a:r>
+              <a:rPr lang="nl-BE" sz="2000" dirty="0">
+                <a:solidFill>
+                  <a:schemeClr val="tx1"/>
+                </a:solidFill>
+              </a:rPr>
+              <a:t> ten opzichte van </a:t>
+            </a:r>
+            <a:r>
+              <a:rPr lang="nl-BE" sz="2000" b="1" dirty="0">
+                <a:solidFill>
+                  <a:srgbClr val="E73B2A"/>
+                </a:solidFill>
+              </a:rPr>
+              <a:t>basisversie</a:t>
+            </a:r>
+            <a:r>
+              <a:rPr lang="nl-BE" sz="2000" dirty="0">
+                <a:solidFill>
+                  <a:schemeClr val="tx1"/>
+                </a:solidFill>
+              </a:rPr>
+              <a:t> van de </a:t>
+            </a:r>
+            <a:r>
+              <a:rPr lang="nl-BE" sz="2000" dirty="0" err="1">
+                <a:solidFill>
+                  <a:schemeClr val="tx1"/>
+                </a:solidFill>
+              </a:rPr>
+              <a:t>mindmap</a:t>
+            </a:r>
+            <a:r>
+              <a:rPr lang="nl-BE" sz="2000" dirty="0">
+                <a:solidFill>
+                  <a:schemeClr val="tx1"/>
+                </a:solidFill>
+              </a:rPr>
+              <a:t> software?</a:t>
+            </a:r>
           </a:p>
         </p:txBody>
       </p:sp>
@@ -8288,25 +8499,17 @@
         <p:spPr/>
         <p:txBody>
           <a:bodyPr>
-            <a:normAutofit fontScale="85000" lnSpcReduction="20000"/>
+            <a:normAutofit/>
           </a:bodyPr>
           <a:lstStyle/>
           <a:p>
             <a:r>
               <a:rPr lang="nl-BE" dirty="0"/>
-              <a:t>Ontwikkeling van een gebruiksvriendelijke security modellering applicatie gebaseerd op </a:t>
-            </a:r>
-            <a:r>
-              <a:rPr lang="nl-BE" dirty="0" err="1"/>
-              <a:t>fortunately</a:t>
-            </a:r>
-            <a:r>
-              <a:rPr lang="nl-BE" dirty="0"/>
-              <a:t>/</a:t>
-            </a:r>
-            <a:r>
-              <a:rPr lang="nl-BE" dirty="0" err="1"/>
-              <a:t>unfortunately</a:t>
+              <a:t>Gebruiksvriendelijke beveiligingsmodelleringtool voor de </a:t>
+            </a:r>
+            <a:r>
+              <a:rPr lang="nl-BE" i="1" dirty="0" err="1"/>
+              <a:t>fortunately-unfortunately</a:t>
             </a:r>
             <a:r>
               <a:rPr lang="nl-BE" dirty="0"/>
@@ -8608,7 +8811,7 @@
         </p:nvSpPr>
         <p:spPr>
           <a:xfrm>
-            <a:off x="8650390" y="20530193"/>
+            <a:off x="8650390" y="20482068"/>
             <a:ext cx="3543014" cy="658523"/>
           </a:xfrm>
           <a:prstGeom prst="roundRect">
@@ -8740,11 +8943,11 @@
             </a:r>
             <a:r>
               <a:rPr lang="nl-BE" sz="1600" dirty="0" err="1"/>
-              <a:t>Danger</a:t>
+              <a:t>danger</a:t>
             </a:r>
             <a:r>
               <a:rPr lang="nl-BE" sz="1600" dirty="0"/>
-              <a:t> rating knop</a:t>
+              <a:t> rating-knop</a:t>
             </a:r>
             <a:endParaRPr lang="nl-BE" sz="1600" dirty="0">
               <a:solidFill>
@@ -8784,7 +8987,7 @@
             <a:pPr algn="ctr"/>
             <a:r>
               <a:rPr lang="nl-BE" sz="1600" dirty="0"/>
-              <a:t>Figuur 2: Uitgeklapte status knop</a:t>
+              <a:t>Figuur 2: Uitgeklapte statusknop</a:t>
             </a:r>
             <a:endParaRPr lang="nl-BE" sz="1600" dirty="0">
               <a:solidFill>
@@ -8824,7 +9027,7 @@
             <a:pPr algn="ctr"/>
             <a:r>
               <a:rPr lang="nl-BE" sz="1600" dirty="0"/>
-              <a:t>Figuur 6: Ingeklapte status filter met hoeveelheid </a:t>
+              <a:t>Figuur 6: Ingeklapte statusfilter met aantal </a:t>
             </a:r>
             <a:r>
               <a:rPr lang="nl-BE" sz="1600" dirty="0" err="1"/>
@@ -9007,7 +9210,7 @@
           </a:bodyPr>
           <a:lstStyle/>
           <a:p>
-            <a:pPr algn="ctr">
+            <a:pPr>
               <a:spcAft>
                 <a:spcPts val="600"/>
               </a:spcAft>
@@ -9054,23 +9257,7 @@
                   <a:srgbClr val="E73B2B"/>
                 </a:solidFill>
               </a:rPr>
-              <a:t>/D3 </a:t>
-            </a:r>
-            <a:r>
-              <a:rPr lang="nl-BE" sz="2000" b="1" dirty="0" err="1">
-                <a:solidFill>
-                  <a:srgbClr val="E73B2B"/>
-                </a:solidFill>
-              </a:rPr>
-              <a:t>webprototype</a:t>
-            </a:r>
-            <a:r>
-              <a:rPr lang="nl-BE" sz="2000" b="1" dirty="0">
-                <a:solidFill>
-                  <a:srgbClr val="E73B2B"/>
-                </a:solidFill>
-              </a:rPr>
-              <a:t> </a:t>
+              <a:t>/D3-webprototype </a:t>
             </a:r>
             <a:r>
               <a:rPr lang="nl-BE" sz="2000" dirty="0"/>
@@ -9078,11 +9265,19 @@
             </a:r>
             <a:r>
               <a:rPr lang="nl-BE" sz="2000" dirty="0" err="1"/>
-              <a:t>Fortunately-Unfortunately</a:t>
+              <a:t>fortunately</a:t>
             </a:r>
             <a:r>
               <a:rPr lang="nl-BE" sz="2000" dirty="0"/>
-              <a:t> boomfunctionaliteit en UX-features voor </a:t>
+              <a:t>/</a:t>
+            </a:r>
+            <a:r>
+              <a:rPr lang="nl-BE" sz="2000" dirty="0" err="1"/>
+              <a:t>unfortunately</a:t>
+            </a:r>
+            <a:r>
+              <a:rPr lang="nl-BE" sz="2000" dirty="0"/>
+              <a:t>-boomfunctionaliteit en UX-features voor </a:t>
             </a:r>
             <a:r>
               <a:rPr lang="nl-BE" sz="2000" dirty="0" err="1"/>
@@ -9105,12 +9300,16 @@
               <a:t> zoals </a:t>
             </a:r>
             <a:r>
-              <a:rPr lang="nl-BE" sz="2000" dirty="0" err="1"/>
+              <a:rPr lang="nl-BE" sz="2000" i="1" dirty="0" err="1"/>
               <a:t>danger</a:t>
             </a:r>
             <a:r>
+              <a:rPr lang="nl-BE" sz="2000" i="1" dirty="0"/>
+              <a:t> rating</a:t>
+            </a:r>
+            <a:r>
               <a:rPr lang="nl-BE" sz="2000" dirty="0"/>
-              <a:t> rating, statusiconen en kleurcodering ondersteunen directe </a:t>
+              <a:t>, statusiconen en kleurcodering ondersteunen directe </a:t>
             </a:r>
             <a:r>
               <a:rPr lang="nl-BE" sz="2000" b="1" dirty="0">
@@ -9142,7 +9341,7 @@
         <p:spPr>
           <a:xfrm>
             <a:off x="484875" y="25610766"/>
-            <a:ext cx="20314040" cy="1590072"/>
+            <a:ext cx="20314040" cy="1723740"/>
           </a:xfrm>
           <a:prstGeom prst="roundRect">
             <a:avLst/>
@@ -9177,14 +9376,13 @@
           <a:bodyPr rtlCol="0" anchor="ctr"/>
           <a:lstStyle/>
           <a:p>
-            <a:pPr algn="ctr"/>
             <a:r>
               <a:rPr lang="nl-BE" sz="2000" dirty="0">
                 <a:solidFill>
                   <a:schemeClr val="tx1"/>
                 </a:solidFill>
               </a:rPr>
-              <a:t>De </a:t>
+              <a:t>Een minimale </a:t>
             </a:r>
             <a:r>
               <a:rPr lang="nl-BE" sz="2000" dirty="0" err="1">
@@ -9192,6 +9390,22 @@
                   <a:schemeClr val="tx1"/>
                 </a:solidFill>
               </a:rPr>
+              <a:t>mindmap</a:t>
+            </a:r>
+            <a:r>
+              <a:rPr lang="nl-BE" sz="2000" dirty="0">
+                <a:solidFill>
+                  <a:schemeClr val="tx1"/>
+                </a:solidFill>
+              </a:rPr>
+              <a:t>‑achtige ondersteuning volstaat om </a:t>
+            </a:r>
+            <a:r>
+              <a:rPr lang="nl-BE" sz="2000" dirty="0" err="1">
+                <a:solidFill>
+                  <a:schemeClr val="tx1"/>
+                </a:solidFill>
+              </a:rPr>
               <a:t>Fortunately</a:t>
             </a:r>
             <a:r>
@@ -9200,7 +9414,7 @@
                   <a:schemeClr val="tx1"/>
                 </a:solidFill>
               </a:rPr>
-              <a:t>–</a:t>
+              <a:t>‑</a:t>
             </a:r>
             <a:r>
               <a:rPr lang="nl-BE" sz="2000" dirty="0" err="1">
@@ -9216,6 +9430,22 @@
                   <a:schemeClr val="tx1"/>
                 </a:solidFill>
               </a:rPr>
+              <a:t>‑trees op te bouwen, maar is onvoldoende voor vlotte, foutarme </a:t>
+            </a:r>
+            <a:r>
+              <a:rPr lang="nl-BE" sz="2000" dirty="0" err="1">
+                <a:solidFill>
+                  <a:schemeClr val="tx1"/>
+                </a:solidFill>
+              </a:rPr>
+              <a:t>threat</a:t>
+            </a:r>
+            <a:r>
+              <a:rPr lang="nl-BE" sz="2000" dirty="0">
+                <a:solidFill>
+                  <a:schemeClr val="tx1"/>
+                </a:solidFill>
+              </a:rPr>
               <a:t> </a:t>
             </a:r>
             <a:r>
@@ -9224,7 +9454,7 @@
                   <a:schemeClr val="tx1"/>
                 </a:solidFill>
               </a:rPr>
-              <a:t>webtool</a:t>
+              <a:t>modeling</a:t>
             </a:r>
             <a:r>
               <a:rPr lang="nl-BE" sz="2000" dirty="0">
@@ -9232,15 +9462,47 @@
                   <a:schemeClr val="tx1"/>
                 </a:solidFill>
               </a:rPr>
-              <a:t> biedt een </a:t>
+              <a:t> door niet‑security‑experts. Door </a:t>
+            </a:r>
+            <a:r>
+              <a:rPr lang="nl-BE" sz="2000" dirty="0" err="1">
+                <a:solidFill>
+                  <a:schemeClr val="tx1"/>
+                </a:solidFill>
+              </a:rPr>
+              <a:t>domeinspecifieke</a:t>
+            </a:r>
+            <a:r>
+              <a:rPr lang="nl-BE" sz="2000" dirty="0">
+                <a:solidFill>
+                  <a:schemeClr val="tx1"/>
+                </a:solidFill>
+              </a:rPr>
+              <a:t> UX‑features zoals </a:t>
             </a:r>
             <a:r>
               <a:rPr lang="nl-BE" sz="2000" b="1" dirty="0">
                 <a:solidFill>
-                  <a:srgbClr val="E73B2B"/>
-                </a:solidFill>
-              </a:rPr>
-              <a:t>toegankelijke</a:t>
+                  <a:srgbClr val="E73B2A"/>
+                </a:solidFill>
+              </a:rPr>
+              <a:t>status‑gebaseerde filtering, automatische </a:t>
+            </a:r>
+            <a:r>
+              <a:rPr lang="nl-BE" sz="2000" b="1" dirty="0" err="1">
+                <a:solidFill>
+                  <a:srgbClr val="E73B2A"/>
+                </a:solidFill>
+              </a:rPr>
+              <a:t>danger</a:t>
+            </a:r>
+            <a:r>
+              <a:rPr lang="nl-BE" sz="2000" b="1" dirty="0">
+                <a:solidFill>
+                  <a:srgbClr val="E73B2A"/>
+                </a:solidFill>
+              </a:rPr>
+              <a:t> rating, kleurcodering</a:t>
             </a:r>
             <a:r>
               <a:rPr lang="nl-BE" sz="2000" dirty="0">
@@ -9248,7 +9510,175 @@
                   <a:schemeClr val="tx1"/>
                 </a:solidFill>
               </a:rPr>
-              <a:t> oplossing voor </a:t>
+              <a:t> en </a:t>
+            </a:r>
+            <a:r>
+              <a:rPr lang="nl-BE" sz="2000" b="1" dirty="0" err="1">
+                <a:solidFill>
+                  <a:srgbClr val="E73B2A"/>
+                </a:solidFill>
+              </a:rPr>
+              <a:t>branch</a:t>
+            </a:r>
+            <a:r>
+              <a:rPr lang="nl-BE" sz="2000" b="1" dirty="0">
+                <a:solidFill>
+                  <a:srgbClr val="E73B2A"/>
+                </a:solidFill>
+              </a:rPr>
+              <a:t> </a:t>
+            </a:r>
+            <a:r>
+              <a:rPr lang="nl-BE" sz="2000" b="1" dirty="0" err="1">
+                <a:solidFill>
+                  <a:srgbClr val="E73B2A"/>
+                </a:solidFill>
+              </a:rPr>
+              <a:t>summaries</a:t>
+            </a:r>
+            <a:r>
+              <a:rPr lang="nl-BE" sz="2000" b="1" dirty="0">
+                <a:solidFill>
+                  <a:srgbClr val="E73B2A"/>
+                </a:solidFill>
+              </a:rPr>
+              <a:t> daalt</a:t>
+            </a:r>
+            <a:r>
+              <a:rPr lang="nl-BE" sz="2000" dirty="0">
+                <a:solidFill>
+                  <a:schemeClr val="tx1"/>
+                </a:solidFill>
+              </a:rPr>
+              <a:t> de </a:t>
+            </a:r>
+            <a:r>
+              <a:rPr lang="nl-BE" sz="2000" b="1" dirty="0">
+                <a:solidFill>
+                  <a:srgbClr val="E73B2A"/>
+                </a:solidFill>
+              </a:rPr>
+              <a:t>cognitieve belasting </a:t>
+            </a:r>
+            <a:r>
+              <a:rPr lang="nl-BE" sz="2000" dirty="0">
+                <a:solidFill>
+                  <a:schemeClr val="tx1"/>
+                </a:solidFill>
+              </a:rPr>
+              <a:t>voor gebruikers. De </a:t>
+            </a:r>
+            <a:r>
+              <a:rPr lang="nl-BE" sz="2000" b="1" dirty="0">
+                <a:solidFill>
+                  <a:srgbClr val="E73B2A"/>
+                </a:solidFill>
+              </a:rPr>
+              <a:t>uitgebreide tool </a:t>
+            </a:r>
+            <a:r>
+              <a:rPr lang="nl-BE" sz="2000" dirty="0">
+                <a:solidFill>
+                  <a:schemeClr val="tx1"/>
+                </a:solidFill>
+              </a:rPr>
+              <a:t>wordt consequent als </a:t>
+            </a:r>
+            <a:r>
+              <a:rPr lang="nl-BE" sz="2000" b="1" dirty="0">
+                <a:solidFill>
+                  <a:srgbClr val="E73B2A"/>
+                </a:solidFill>
+              </a:rPr>
+              <a:t>voorkeursversie aangeduid </a:t>
+            </a:r>
+            <a:r>
+              <a:rPr lang="nl-BE" sz="2000" dirty="0">
+                <a:solidFill>
+                  <a:schemeClr val="tx1"/>
+                </a:solidFill>
+              </a:rPr>
+              <a:t>en verschuift het </a:t>
+            </a:r>
+            <a:r>
+              <a:rPr lang="nl-BE" sz="2000" b="1" dirty="0">
+                <a:solidFill>
+                  <a:srgbClr val="E73B2A"/>
+                </a:solidFill>
+              </a:rPr>
+              <a:t>user-</a:t>
+            </a:r>
+            <a:r>
+              <a:rPr lang="nl-BE" sz="2000" b="1" dirty="0" err="1">
+                <a:solidFill>
+                  <a:srgbClr val="E73B2A"/>
+                </a:solidFill>
+              </a:rPr>
+              <a:t>experience</a:t>
+            </a:r>
+            <a:r>
+              <a:rPr lang="nl-BE" sz="2000" b="1" dirty="0">
+                <a:solidFill>
+                  <a:srgbClr val="E73B2A"/>
+                </a:solidFill>
+              </a:rPr>
+              <a:t> (UX) profiel </a:t>
+            </a:r>
+            <a:r>
+              <a:rPr lang="nl-BE" sz="2000" dirty="0">
+                <a:solidFill>
+                  <a:schemeClr val="tx1"/>
+                </a:solidFill>
+              </a:rPr>
+              <a:t>van negatief naar </a:t>
+            </a:r>
+            <a:r>
+              <a:rPr lang="nl-BE" sz="2000" b="1" dirty="0">
+                <a:solidFill>
+                  <a:srgbClr val="E73B2A"/>
+                </a:solidFill>
+              </a:rPr>
+              <a:t>duidelijk positief</a:t>
+            </a:r>
+            <a:r>
+              <a:rPr lang="nl-BE" sz="2000" dirty="0">
+                <a:solidFill>
+                  <a:schemeClr val="tx1"/>
+                </a:solidFill>
+              </a:rPr>
+              <a:t>, wat erop wijst dat gerichte UX‑ontwerpkeuzes de </a:t>
+            </a:r>
+            <a:r>
+              <a:rPr lang="nl-BE" sz="2000" b="1" dirty="0">
+                <a:solidFill>
+                  <a:srgbClr val="E73B2A"/>
+                </a:solidFill>
+              </a:rPr>
+              <a:t>toegankelijkheid</a:t>
+            </a:r>
+            <a:r>
+              <a:rPr lang="nl-BE" sz="2000" dirty="0">
+                <a:solidFill>
+                  <a:schemeClr val="tx1"/>
+                </a:solidFill>
+              </a:rPr>
+              <a:t> en </a:t>
+            </a:r>
+            <a:r>
+              <a:rPr lang="nl-BE" sz="2000" b="1" dirty="0">
+                <a:solidFill>
+                  <a:srgbClr val="E73B2A"/>
+                </a:solidFill>
+              </a:rPr>
+              <a:t>adoptie</a:t>
+            </a:r>
+            <a:r>
+              <a:rPr lang="nl-BE" sz="2000" dirty="0">
+                <a:solidFill>
+                  <a:schemeClr val="tx1"/>
+                </a:solidFill>
+              </a:rPr>
+              <a:t> van </a:t>
             </a:r>
             <a:r>
               <a:rPr lang="nl-BE" sz="2000" dirty="0" err="1">
@@ -9280,15 +9710,31 @@
                   <a:schemeClr val="tx1"/>
                 </a:solidFill>
               </a:rPr>
-              <a:t> door niet-security-experts, met </a:t>
+              <a:t> in </a:t>
+            </a:r>
+            <a:r>
+              <a:rPr lang="nl-BE" sz="2000" dirty="0" err="1">
+                <a:solidFill>
+                  <a:schemeClr val="tx1"/>
+                </a:solidFill>
+              </a:rPr>
+              <a:t>DevSecOps</a:t>
+            </a:r>
+            <a:r>
+              <a:rPr lang="nl-BE" sz="2000" dirty="0">
+                <a:solidFill>
+                  <a:schemeClr val="tx1"/>
+                </a:solidFill>
+              </a:rPr>
+              <a:t>‑context </a:t>
             </a:r>
             <a:r>
               <a:rPr lang="nl-BE" sz="2000" b="1" dirty="0">
                 <a:solidFill>
-                  <a:srgbClr val="E73B2B"/>
-                </a:solidFill>
-              </a:rPr>
-              <a:t>superieure</a:t>
+                  <a:srgbClr val="E73B2A"/>
+                </a:solidFill>
+              </a:rPr>
+              <a:t>substantieel</a:t>
             </a:r>
             <a:r>
               <a:rPr lang="nl-BE" sz="2000" dirty="0">
@@ -9301,10 +9747,10 @@
             <a:r>
               <a:rPr lang="nl-BE" sz="2000" b="1" dirty="0">
                 <a:solidFill>
-                  <a:srgbClr val="E73B2B"/>
-                </a:solidFill>
-              </a:rPr>
-              <a:t>prestaties</a:t>
+                  <a:srgbClr val="E73B2A"/>
+                </a:solidFill>
+              </a:rPr>
+              <a:t>kunnen</a:t>
             </a:r>
             <a:r>
               <a:rPr lang="nl-BE" sz="2000" dirty="0">
@@ -9312,119 +9758,23 @@
                   <a:schemeClr val="tx1"/>
                 </a:solidFill>
               </a:rPr>
-              <a:t> (+28% snelheid, +42% nauwkeurigheid </a:t>
-            </a:r>
-            <a:r>
-              <a:rPr lang="nl-BE" sz="2000" dirty="0" err="1">
+              <a:t> </a:t>
+            </a:r>
+            <a:r>
+              <a:rPr lang="nl-BE" sz="2000" b="1" dirty="0">
+                <a:solidFill>
+                  <a:srgbClr val="E73B2A"/>
+                </a:solidFill>
+              </a:rPr>
+              <a:t>versterken</a:t>
+            </a:r>
+            <a:r>
+              <a:rPr lang="nl-BE" sz="2000" dirty="0">
                 <a:solidFill>
                   <a:schemeClr val="tx1"/>
                 </a:solidFill>
               </a:rPr>
-              <a:t>vs</a:t>
-            </a:r>
-            <a:r>
-              <a:rPr lang="nl-BE" sz="2000" dirty="0">
-                <a:solidFill>
-                  <a:schemeClr val="tx1"/>
-                </a:solidFill>
-              </a:rPr>
-              <a:t> mind </a:t>
-            </a:r>
-            <a:r>
-              <a:rPr lang="nl-BE" sz="2000" dirty="0" err="1">
-                <a:solidFill>
-                  <a:schemeClr val="tx1"/>
-                </a:solidFill>
-              </a:rPr>
-              <a:t>maps</a:t>
-            </a:r>
-            <a:r>
-              <a:rPr lang="nl-BE" sz="2000" dirty="0">
-                <a:solidFill>
-                  <a:schemeClr val="tx1"/>
-                </a:solidFill>
-              </a:rPr>
-              <a:t>). Kleurcodering, statusiconen en filtering prioritering </a:t>
-            </a:r>
-            <a:r>
-              <a:rPr lang="nl-BE" sz="2000" b="1" dirty="0">
-                <a:solidFill>
-                  <a:srgbClr val="E73B2B"/>
-                </a:solidFill>
-              </a:rPr>
-              <a:t>verhogen </a:t>
-            </a:r>
-            <a:r>
-              <a:rPr lang="nl-BE" sz="2000" dirty="0">
-                <a:solidFill>
-                  <a:schemeClr val="tx1"/>
-                </a:solidFill>
-              </a:rPr>
-              <a:t>de</a:t>
-            </a:r>
-            <a:r>
-              <a:rPr lang="nl-BE" sz="2000" dirty="0">
-                <a:solidFill>
-                  <a:srgbClr val="E73B2B"/>
-                </a:solidFill>
-              </a:rPr>
-              <a:t> </a:t>
-            </a:r>
-            <a:r>
-              <a:rPr lang="nl-BE" sz="2000" b="1" dirty="0">
-                <a:solidFill>
-                  <a:srgbClr val="E73B2B"/>
-                </a:solidFill>
-              </a:rPr>
-              <a:t>bruikbaarheid</a:t>
-            </a:r>
-            <a:r>
-              <a:rPr lang="nl-BE" sz="2000" dirty="0">
-                <a:solidFill>
-                  <a:schemeClr val="tx1"/>
-                </a:solidFill>
-              </a:rPr>
-              <a:t>, terwijl </a:t>
-            </a:r>
-            <a:r>
-              <a:rPr lang="nl-BE" sz="2000" b="1" dirty="0">
-                <a:solidFill>
-                  <a:srgbClr val="E73B2B"/>
-                </a:solidFill>
-              </a:rPr>
-              <a:t>tooltips</a:t>
-            </a:r>
-            <a:r>
-              <a:rPr lang="nl-BE" sz="2000" dirty="0">
-                <a:solidFill>
-                  <a:srgbClr val="E73B2B"/>
-                </a:solidFill>
-              </a:rPr>
-              <a:t> </a:t>
-            </a:r>
-            <a:r>
-              <a:rPr lang="nl-BE" sz="2000" b="1" dirty="0">
-                <a:solidFill>
-                  <a:srgbClr val="E73B2B"/>
-                </a:solidFill>
-              </a:rPr>
-              <a:t>essentieel</a:t>
-            </a:r>
-            <a:r>
-              <a:rPr lang="nl-BE" sz="2000" dirty="0">
-                <a:solidFill>
-                  <a:srgbClr val="E73B2B"/>
-                </a:solidFill>
-              </a:rPr>
-              <a:t> </a:t>
-            </a:r>
-            <a:r>
-              <a:rPr lang="nl-BE" sz="2000" dirty="0">
-                <a:solidFill>
-                  <a:schemeClr val="tx1"/>
-                </a:solidFill>
-              </a:rPr>
-              <a:t>blijken voor beginners. De intuïtieve boomstructuur en contextuele ondersteuning maken complexe dreigingsanalyse praktisch haalbaar. Toekomstig werk richt zich op </a:t>
+              <a:t>. Toekomstig werk richt zich op </a:t>
             </a:r>
             <a:r>
               <a:rPr lang="nl-BE" sz="2000" b="1" dirty="0">
@@ -9491,8 +9841,8 @@
         </p:nvSpPr>
         <p:spPr>
           <a:xfrm>
-            <a:off x="8650390" y="25210357"/>
-            <a:ext cx="3543014" cy="617983"/>
+            <a:off x="8650390" y="25114107"/>
+            <a:ext cx="3543014" cy="595505"/>
           </a:xfrm>
           <a:prstGeom prst="roundRect">
             <a:avLst/>
@@ -9624,7 +9974,7 @@
           <p:nvPr>
             <p:extLst>
               <p:ext uri="{D42A27DB-BD31-4B8C-83A1-F6EECF244321}">
-                <p14:modId xmlns:p14="http://schemas.microsoft.com/office/powerpoint/2010/main" val="2499100360"/>
+                <p14:modId xmlns:p14="http://schemas.microsoft.com/office/powerpoint/2010/main" val="4036674948"/>
               </p:ext>
             </p:extLst>
           </p:nvPr>
@@ -9652,7 +10002,7 @@
           <p:nvPr>
             <p:extLst>
               <p:ext uri="{D42A27DB-BD31-4B8C-83A1-F6EECF244321}">
-                <p14:modId xmlns:p14="http://schemas.microsoft.com/office/powerpoint/2010/main" val="4181795450"/>
+                <p14:modId xmlns:p14="http://schemas.microsoft.com/office/powerpoint/2010/main" val="1560762166"/>
               </p:ext>
             </p:extLst>
           </p:nvPr>
@@ -9752,8 +10102,8 @@
         </p:nvSpPr>
         <p:spPr>
           <a:xfrm>
-            <a:off x="649290" y="21169716"/>
-            <a:ext cx="12606474" cy="1631216"/>
+            <a:off x="1092051" y="21102341"/>
+            <a:ext cx="12284375" cy="4262705"/>
           </a:xfrm>
           <a:prstGeom prst="rect">
             <a:avLst/>
@@ -9765,46 +10115,122 @@
           </a:bodyPr>
           <a:lstStyle/>
           <a:p>
-            <a:pPr algn="ctr">
+            <a:pPr>
               <a:spcAft>
                 <a:spcPts val="600"/>
               </a:spcAft>
             </a:pPr>
             <a:r>
+              <a:rPr lang="nl-BE" sz="1800" dirty="0"/>
+              <a:t>De </a:t>
+            </a:r>
+            <a:r>
               <a:rPr lang="nl-BE" sz="1800" b="1" dirty="0">
                 <a:solidFill>
+                  <a:srgbClr val="E73B2A"/>
+                </a:solidFill>
+              </a:rPr>
+              <a:t>uitgebreide versie </a:t>
+            </a:r>
+            <a:r>
+              <a:rPr lang="nl-BE" sz="1800" dirty="0"/>
+              <a:t>van de </a:t>
+            </a:r>
+            <a:r>
+              <a:rPr lang="nl-BE" sz="1800" dirty="0" err="1"/>
+              <a:t>Fortunately</a:t>
+            </a:r>
+            <a:r>
+              <a:rPr lang="nl-BE" sz="1800" dirty="0"/>
+              <a:t>‑</a:t>
+            </a:r>
+            <a:r>
+              <a:rPr lang="nl-BE" sz="1800" dirty="0" err="1"/>
+              <a:t>Unfortunately</a:t>
+            </a:r>
+            <a:r>
+              <a:rPr lang="nl-BE" sz="1800" dirty="0"/>
+              <a:t>‑tool leidt tot een </a:t>
+            </a:r>
+            <a:r>
+              <a:rPr lang="nl-BE" sz="1800" b="1" dirty="0">
+                <a:solidFill>
+                  <a:srgbClr val="E73B2A"/>
+                </a:solidFill>
+              </a:rPr>
+              <a:t>duidelijk betere gebruikerservaring </a:t>
+            </a:r>
+            <a:r>
+              <a:rPr lang="nl-BE" sz="1800" dirty="0"/>
+              <a:t>dan de basis </a:t>
+            </a:r>
+            <a:r>
+              <a:rPr lang="nl-BE" sz="1800" dirty="0" err="1"/>
+              <a:t>mindmap</a:t>
+            </a:r>
+            <a:r>
+              <a:rPr lang="nl-BE" sz="1800" dirty="0"/>
+              <a:t>‑achtige versie. De </a:t>
+            </a:r>
+            <a:r>
+              <a:rPr lang="nl-BE" sz="1800" b="1" dirty="0">
+                <a:solidFill>
+                  <a:srgbClr val="E73B2A"/>
+                </a:solidFill>
+              </a:rPr>
+              <a:t>UEQ‑resultaten </a:t>
+            </a:r>
+            <a:r>
+              <a:rPr lang="nl-BE" sz="1800" dirty="0"/>
+              <a:t>tonen een </a:t>
+            </a:r>
+            <a:r>
+              <a:rPr lang="nl-BE" sz="1800" b="1" dirty="0">
+                <a:solidFill>
+                  <a:srgbClr val="E73B2A"/>
+                </a:solidFill>
+              </a:rPr>
+              <a:t>verschuiving</a:t>
+            </a:r>
+            <a:r>
+              <a:rPr lang="nl-BE" sz="1800" dirty="0"/>
+              <a:t> van </a:t>
+            </a:r>
+            <a:r>
+              <a:rPr lang="nl-BE" sz="1800" b="1" dirty="0">
+                <a:solidFill>
+                  <a:srgbClr val="E73B2A"/>
+                </a:solidFill>
+              </a:rPr>
+              <a:t>overwegend negatieve naar positieve scores </a:t>
+            </a:r>
+            <a:r>
+              <a:rPr lang="nl-BE" sz="1800" dirty="0"/>
+              <a:t>op alle dimensies, met onder meer een hogere aantrekkelijkheid, </a:t>
+            </a:r>
+            <a:r>
+              <a:rPr lang="nl-BE" sz="1800" b="1" dirty="0">
+                <a:solidFill>
+                  <a:srgbClr val="E73B2A"/>
+                </a:solidFill>
+              </a:rPr>
+              <a:t>efficiëntie (-0,72 naar 1,33)</a:t>
+            </a:r>
+            <a:r>
+              <a:rPr lang="nl-BE" sz="1800" dirty="0"/>
+              <a:t> en stimulatie voor de uitgebreide versie. Figuur 7 geeft de </a:t>
+            </a:r>
+            <a:r>
+              <a:rPr lang="nl-BE" sz="1800" b="1" dirty="0">
+                <a:solidFill>
                   <a:srgbClr val="E73B2B"/>
                 </a:solidFill>
               </a:rPr>
-              <a:t>Taakprestaties</a:t>
+              <a:t>scores</a:t>
             </a:r>
             <a:r>
               <a:rPr lang="nl-BE" sz="1800" dirty="0"/>
-              <a:t> (2 scenario's): de </a:t>
-            </a:r>
-            <a:r>
-              <a:rPr lang="nl-BE" sz="1800" b="1" dirty="0">
-                <a:solidFill>
-                  <a:srgbClr val="E73B2B"/>
-                </a:solidFill>
-              </a:rPr>
-              <a:t>uitgebreide tool</a:t>
-            </a:r>
-            <a:r>
-              <a:rPr lang="nl-BE" sz="1800" dirty="0"/>
-              <a:t> voltooit taken </a:t>
-            </a:r>
-            <a:r>
-              <a:rPr lang="nl-BE" sz="1800" b="1" dirty="0">
-                <a:solidFill>
-                  <a:srgbClr val="E73B2B"/>
-                </a:solidFill>
-              </a:rPr>
-              <a:t>28% sneller </a:t>
-            </a:r>
-            <a:r>
-              <a:rPr lang="nl-BE" sz="1800" dirty="0"/>
-              <a:t>(13.8 </a:t>
+              <a:t> (uitgebreide </a:t>
             </a:r>
             <a:r>
               <a:rPr lang="nl-BE" sz="1800" dirty="0" err="1"/>
@@ -9812,7 +10238,7 @@
             </a:r>
             <a:r>
               <a:rPr lang="nl-BE" sz="1800" dirty="0"/>
-              <a:t> 19.2 min), bereikt </a:t>
+              <a:t> basis software, alle &gt;0=positief) weer die werden verkregen uit de </a:t>
             </a:r>
             <a:r>
               <a:rPr lang="nl-BE" sz="1800" b="1" dirty="0">
@@ -9820,39 +10246,27 @@
                   <a:srgbClr val="E73B2B"/>
                 </a:solidFill>
               </a:rPr>
-              <a:t>42% hogere nauwkeurigheid </a:t>
+              <a:t>user </a:t>
+            </a:r>
+            <a:r>
+              <a:rPr lang="nl-BE" sz="1800" b="1" dirty="0" err="1">
+                <a:solidFill>
+                  <a:srgbClr val="E73B2B"/>
+                </a:solidFill>
+              </a:rPr>
+              <a:t>experience</a:t>
+            </a:r>
+            <a:r>
+              <a:rPr lang="nl-BE" sz="1800" b="1" dirty="0">
+                <a:solidFill>
+                  <a:srgbClr val="E73B2B"/>
+                </a:solidFill>
+              </a:rPr>
+              <a:t> questionnaire (UEQ)</a:t>
             </a:r>
             <a:r>
               <a:rPr lang="nl-BE" sz="1800" dirty="0"/>
-              <a:t>(91% </a:t>
-            </a:r>
-            <a:r>
-              <a:rPr lang="nl-BE" sz="1800" dirty="0" err="1"/>
-              <a:t>vs</a:t>
-            </a:r>
-            <a:r>
-              <a:rPr lang="nl-BE" sz="1800" dirty="0"/>
-              <a:t> 64% succes) en </a:t>
-            </a:r>
-            <a:r>
-              <a:rPr lang="nl-BE" sz="1800" b="1" dirty="0">
-                <a:solidFill>
-                  <a:srgbClr val="E73B2B"/>
-                </a:solidFill>
-              </a:rPr>
-              <a:t>reduceert navigatiefouten met 71% </a:t>
-            </a:r>
-            <a:r>
-              <a:rPr lang="nl-BE" sz="1800" dirty="0"/>
-              <a:t>(7% </a:t>
-            </a:r>
-            <a:r>
-              <a:rPr lang="nl-BE" sz="1800" dirty="0" err="1"/>
-              <a:t>vs</a:t>
-            </a:r>
-            <a:r>
-              <a:rPr lang="nl-BE" sz="1800" dirty="0"/>
-              <a:t> 24%) vergeleken met de basisversie.</a:t>
+              <a:t>. </a:t>
             </a:r>
           </a:p>
           <a:p>
@@ -9861,74 +10275,113 @@
                 <a:spcPts val="600"/>
               </a:spcAft>
             </a:pPr>
+            <a:endParaRPr lang="nl-BE" sz="1000" dirty="0"/>
+          </a:p>
+          <a:p>
+            <a:pPr>
+              <a:spcAft>
+                <a:spcPts val="600"/>
+              </a:spcAft>
+            </a:pPr>
             <a:r>
               <a:rPr lang="nl-BE" sz="1800" dirty="0"/>
-              <a:t>Figuur 7 geeft de </a:t>
+              <a:t>In de observaties bleek dat deelnemers in de basisversie veel tijd verliezen met scrollen, zoeken en manueel tellen, terwijl </a:t>
             </a:r>
             <a:r>
               <a:rPr lang="nl-BE" sz="1800" b="1" dirty="0">
                 <a:solidFill>
-                  <a:srgbClr val="E73B2B"/>
-                </a:solidFill>
-              </a:rPr>
-              <a:t>scores</a:t>
+                  <a:srgbClr val="E73B2A"/>
+                </a:solidFill>
+              </a:rPr>
+              <a:t>filters, statusiconen, </a:t>
+            </a:r>
+            <a:r>
+              <a:rPr lang="nl-BE" sz="1800" b="1" dirty="0" err="1">
+                <a:solidFill>
+                  <a:srgbClr val="E73B2A"/>
+                </a:solidFill>
+              </a:rPr>
+              <a:t>danger</a:t>
+            </a:r>
+            <a:r>
+              <a:rPr lang="nl-BE" sz="1800" b="1" dirty="0">
+                <a:solidFill>
+                  <a:srgbClr val="E73B2A"/>
+                </a:solidFill>
+              </a:rPr>
+              <a:t> rating </a:t>
             </a:r>
             <a:r>
               <a:rPr lang="nl-BE" sz="1800" dirty="0"/>
-              <a:t> (uitgebreide </a:t>
-            </a:r>
-            <a:r>
-              <a:rPr lang="nl-BE" sz="1800" dirty="0" err="1"/>
-              <a:t>vs</a:t>
+              <a:t>en </a:t>
+            </a:r>
+            <a:r>
+              <a:rPr lang="nl-BE" sz="1800" b="1" dirty="0" err="1">
+                <a:solidFill>
+                  <a:srgbClr val="E73B2A"/>
+                </a:solidFill>
+              </a:rPr>
+              <a:t>branch</a:t>
+            </a:r>
+            <a:r>
+              <a:rPr lang="nl-BE" sz="1800" b="1" dirty="0">
+                <a:solidFill>
+                  <a:srgbClr val="E73B2A"/>
+                </a:solidFill>
+              </a:rPr>
+              <a:t> </a:t>
+            </a:r>
+            <a:r>
+              <a:rPr lang="nl-BE" sz="1800" b="1" dirty="0" err="1">
+                <a:solidFill>
+                  <a:srgbClr val="E73B2A"/>
+                </a:solidFill>
+              </a:rPr>
+              <a:t>summaries</a:t>
+            </a:r>
+            <a:r>
+              <a:rPr lang="nl-BE" sz="1800" b="1" dirty="0">
+                <a:solidFill>
+                  <a:srgbClr val="E73B2A"/>
+                </a:solidFill>
+              </a:rPr>
+              <a:t> </a:t>
             </a:r>
             <a:r>
               <a:rPr lang="nl-BE" sz="1800" dirty="0"/>
-              <a:t> basis software, alle &gt;0=positief) weer </a:t>
-            </a:r>
-            <a:r>
-              <a:rPr lang="nl-BE" sz="1800" dirty="0" err="1"/>
-              <a:t>fir</a:t>
+              <a:t>in de uitgebreide versie taken </a:t>
+            </a:r>
+            <a:r>
+              <a:rPr lang="nl-BE" sz="1800" b="1" dirty="0">
+                <a:solidFill>
+                  <a:srgbClr val="E73B2A"/>
+                </a:solidFill>
+              </a:rPr>
+              <a:t>merkbaar versnellen en minder foutgevoelig </a:t>
             </a:r>
             <a:r>
               <a:rPr lang="nl-BE" sz="1800" dirty="0"/>
-              <a:t> werden verkregen uit de </a:t>
-            </a:r>
-            <a:r>
-              <a:rPr lang="nl-BE" sz="1800" b="1" dirty="0">
-                <a:solidFill>
-                  <a:srgbClr val="E73B2B"/>
-                </a:solidFill>
-              </a:rPr>
-              <a:t>user </a:t>
-            </a:r>
-            <a:r>
-              <a:rPr lang="nl-BE" sz="1800" b="1" dirty="0" err="1">
-                <a:solidFill>
-                  <a:srgbClr val="E73B2B"/>
-                </a:solidFill>
-              </a:rPr>
-              <a:t>experience</a:t>
-            </a:r>
-            <a:r>
-              <a:rPr lang="nl-BE" sz="1800" b="1" dirty="0">
-                <a:solidFill>
-                  <a:srgbClr val="E73B2B"/>
-                </a:solidFill>
-              </a:rPr>
-              <a:t> questionnaire (UEQ)</a:t>
-            </a:r>
-            <a:r>
-              <a:rPr lang="nl-BE" sz="1800" dirty="0"/>
-              <a:t>.</a:t>
-            </a:r>
-            <a:endParaRPr lang="nl-BE" sz="1800" b="1" dirty="0">
+              <a:t>maken.</a:t>
+            </a:r>
+          </a:p>
+          <a:p>
+            <a:pPr algn="ctr">
+              <a:spcAft>
+                <a:spcPts val="600"/>
+              </a:spcAft>
+            </a:pPr>
+            <a:endParaRPr lang="nl-BE" sz="200" b="1" dirty="0">
               <a:solidFill>
                 <a:srgbClr val="E73B2B"/>
               </a:solidFill>
             </a:endParaRPr>
           </a:p>
           <a:p>
-            <a:pPr algn="ctr"/>
+            <a:pPr>
+              <a:spcAft>
+                <a:spcPts val="600"/>
+              </a:spcAft>
+            </a:pPr>
             <a:r>
               <a:rPr lang="nl-BE" sz="1800" b="1" dirty="0">
                 <a:solidFill>
@@ -9942,196 +10395,51 @@
               <a:t> (1=meest nuttig, 8=minst):</a:t>
             </a:r>
           </a:p>
-        </p:txBody>
-      </p:sp>
-      <p:sp>
-        <p:nvSpPr>
-          <p:cNvPr id="103" name="Tekstvak 102">
-            <a:extLst>
-              <a:ext uri="{FF2B5EF4-FFF2-40B4-BE49-F238E27FC236}">
-                <a16:creationId xmlns:a16="http://schemas.microsoft.com/office/drawing/2014/main" id="{24680A28-7CBD-6F06-17BD-A1ADB203EF3F}"/>
-              </a:ext>
-            </a:extLst>
-          </p:cNvPr>
-          <p:cNvSpPr txBox="1"/>
-          <p:nvPr/>
-        </p:nvSpPr>
-        <p:spPr>
-          <a:xfrm>
-            <a:off x="3836331" y="8405646"/>
-            <a:ext cx="13158515" cy="1323439"/>
-          </a:xfrm>
-          <a:prstGeom prst="rect">
-            <a:avLst/>
-          </a:prstGeom>
-        </p:spPr>
-        <p:txBody>
-          <a:bodyPr vert="horz" wrap="square" rtlCol="0">
-            <a:spAutoFit/>
-          </a:bodyPr>
-          <a:lstStyle/>
           <a:p>
-            <a:pPr marL="457200" indent="-457200">
+            <a:pPr marL="342900" indent="-342900">
               <a:buFont typeface="+mj-lt"/>
               <a:buAutoNum type="arabicPeriod"/>
             </a:pPr>
             <a:r>
-              <a:rPr lang="nl-BE" sz="2000" dirty="0"/>
-              <a:t>Welke minimale </a:t>
-            </a:r>
-            <a:r>
-              <a:rPr lang="nl-BE" sz="2000" b="1" dirty="0">
-                <a:solidFill>
-                  <a:srgbClr val="E73B2B"/>
-                </a:solidFill>
-              </a:rPr>
-              <a:t>basisfunctionaliteit</a:t>
-            </a:r>
-            <a:r>
-              <a:rPr lang="nl-BE" sz="2000" dirty="0"/>
-              <a:t> is nodig om </a:t>
-            </a:r>
-            <a:r>
-              <a:rPr lang="nl-BE" sz="2000" dirty="0" err="1"/>
-              <a:t>threat</a:t>
-            </a:r>
-            <a:r>
-              <a:rPr lang="nl-BE" sz="2000" dirty="0"/>
-              <a:t> </a:t>
-            </a:r>
-            <a:r>
-              <a:rPr lang="nl-BE" sz="2000" dirty="0" err="1"/>
-              <a:t>modeling</a:t>
-            </a:r>
-            <a:r>
-              <a:rPr lang="nl-BE" sz="2000" dirty="0"/>
-              <a:t> met </a:t>
-            </a:r>
-            <a:r>
-              <a:rPr lang="nl-BE" sz="2000" dirty="0" err="1"/>
-              <a:t>Fortunately-Unfortunately</a:t>
-            </a:r>
-            <a:r>
-              <a:rPr lang="nl-BE" sz="2000" dirty="0"/>
-              <a:t> trees te ondersteunen?</a:t>
+              <a:rPr lang="nl-BE" sz="1800" dirty="0"/>
+              <a:t>filtering op basis van node-status,</a:t>
             </a:r>
           </a:p>
           <a:p>
-            <a:pPr marL="457200" indent="-457200">
+            <a:pPr marL="342900" indent="-342900">
               <a:buFont typeface="+mj-lt"/>
               <a:buAutoNum type="arabicPeriod"/>
             </a:pPr>
             <a:r>
-              <a:rPr lang="nl-BE" sz="2000" dirty="0"/>
-              <a:t>Welke </a:t>
-            </a:r>
-            <a:r>
-              <a:rPr lang="nl-BE" sz="2000" b="1" dirty="0">
-                <a:solidFill>
-                  <a:srgbClr val="E73B2B"/>
-                </a:solidFill>
-              </a:rPr>
-              <a:t>functies</a:t>
-            </a:r>
-            <a:r>
-              <a:rPr lang="nl-BE" sz="2000" dirty="0"/>
-              <a:t> worden als meest </a:t>
-            </a:r>
-            <a:r>
-              <a:rPr lang="nl-BE" sz="2000" b="1" dirty="0">
-                <a:solidFill>
-                  <a:srgbClr val="E73B2B"/>
-                </a:solidFill>
-              </a:rPr>
-              <a:t>nuttig</a:t>
-            </a:r>
-            <a:r>
-              <a:rPr lang="nl-BE" sz="2000" dirty="0"/>
-              <a:t> ervaren?</a:t>
+              <a:rPr lang="nl-BE" sz="1800" dirty="0"/>
+              <a:t>tellen van </a:t>
+            </a:r>
+            <a:r>
+              <a:rPr lang="nl-BE" sz="1800" dirty="0" err="1"/>
+              <a:t>nodes</a:t>
+            </a:r>
+            <a:r>
+              <a:rPr lang="nl-BE" sz="1800" dirty="0"/>
+              <a:t> per status,</a:t>
             </a:r>
           </a:p>
           <a:p>
-            <a:pPr marL="457200" indent="-457200">
+            <a:pPr marL="342900" indent="-342900">
               <a:buFont typeface="+mj-lt"/>
               <a:buAutoNum type="arabicPeriod"/>
             </a:pPr>
             <a:r>
-              <a:rPr lang="nl-BE" sz="2000" dirty="0"/>
-              <a:t>In welke mate verhoogt de toevoeging van </a:t>
-            </a:r>
-            <a:r>
-              <a:rPr lang="nl-BE" sz="2000" b="1" dirty="0">
-                <a:solidFill>
-                  <a:srgbClr val="E73B2B"/>
-                </a:solidFill>
-              </a:rPr>
-              <a:t>educatieve ondersteuning </a:t>
-            </a:r>
-            <a:r>
-              <a:rPr lang="nl-BE" sz="2000" dirty="0"/>
-              <a:t>(tooltips) de </a:t>
-            </a:r>
-            <a:r>
-              <a:rPr lang="nl-BE" sz="2000" b="1" dirty="0">
-                <a:solidFill>
-                  <a:srgbClr val="E73B2B"/>
-                </a:solidFill>
-              </a:rPr>
-              <a:t>bruikbaarheid</a:t>
-            </a:r>
-            <a:r>
-              <a:rPr lang="nl-BE" sz="2000" dirty="0"/>
-              <a:t> van de tool?</a:t>
+              <a:rPr lang="nl-BE" sz="1800" dirty="0"/>
+              <a:t>classificering door het schild-icoon.</a:t>
             </a:r>
           </a:p>
           <a:p>
-            <a:pPr marL="457200" indent="-457200">
+            <a:pPr>
               <a:spcAft>
                 <a:spcPts val="600"/>
               </a:spcAft>
-              <a:buFont typeface="+mj-lt"/>
-              <a:buAutoNum type="arabicPeriod"/>
             </a:pPr>
-            <a:r>
-              <a:rPr lang="nl-BE" sz="2000" dirty="0"/>
-              <a:t>Hoe </a:t>
-            </a:r>
-            <a:r>
-              <a:rPr lang="nl-BE" sz="2000" b="1" dirty="0">
-                <a:solidFill>
-                  <a:srgbClr val="E73B2B"/>
-                </a:solidFill>
-              </a:rPr>
-              <a:t>presteert</a:t>
-            </a:r>
-            <a:r>
-              <a:rPr lang="nl-BE" sz="2000" dirty="0"/>
-              <a:t> de tool vergeleken met </a:t>
-            </a:r>
-            <a:r>
-              <a:rPr lang="nl-BE" sz="2000" b="1" dirty="0">
-                <a:solidFill>
-                  <a:srgbClr val="E73B2B"/>
-                </a:solidFill>
-              </a:rPr>
-              <a:t>generieke</a:t>
-            </a:r>
-            <a:r>
-              <a:rPr lang="nl-BE" sz="2000" dirty="0"/>
-              <a:t> </a:t>
-            </a:r>
-            <a:r>
-              <a:rPr lang="nl-BE" sz="2000" b="1" dirty="0">
-                <a:solidFill>
-                  <a:srgbClr val="E73B2B"/>
-                </a:solidFill>
-              </a:rPr>
-              <a:t>mind map software</a:t>
-            </a:r>
-            <a:r>
-              <a:rPr lang="nl-BE" sz="2000" dirty="0"/>
-              <a:t>?</a:t>
-            </a:r>
+            <a:endParaRPr lang="nl-BE" sz="1800" dirty="0"/>
           </a:p>
         </p:txBody>
       </p:sp>
@@ -10150,7 +10458,7 @@
         <p:spPr>
           <a:xfrm>
             <a:off x="12253386" y="27355622"/>
-            <a:ext cx="10125602" cy="615553"/>
+            <a:ext cx="9135002" cy="861774"/>
           </a:xfrm>
           <a:prstGeom prst="rect">
             <a:avLst/>
@@ -10196,7 +10504,7 @@
                   <a:schemeClr val="tx1"/>
                 </a:solidFill>
               </a:rPr>
-              <a:t>cybersercurity</a:t>
+              <a:t>Threat</a:t>
             </a:r>
             <a:r>
               <a:rPr lang="nl-BE" sz="1600" dirty="0">
@@ -10212,7 +10520,7 @@
                   <a:schemeClr val="tx1"/>
                 </a:solidFill>
               </a:rPr>
-              <a:t>bites</a:t>
+              <a:t>modeling</a:t>
             </a:r>
             <a:r>
               <a:rPr lang="nl-BE" sz="1600" dirty="0">
@@ -10220,7 +10528,7 @@
                   <a:schemeClr val="tx1"/>
                 </a:solidFill>
               </a:rPr>
-              <a:t>,” 3 Oktober 2024. [Online]. </a:t>
+              <a:t> in Nederlandse organisaties,” 3 Oktober 2024. [Online]. </a:t>
             </a:r>
             <a:r>
               <a:rPr lang="nl-BE" sz="1600" dirty="0" err="1">
@@ -10241,36 +10549,6 @@
           </a:p>
         </p:txBody>
       </p:sp>
-      <p:pic>
-        <p:nvPicPr>
-          <p:cNvPr id="113" name="Afbeelding 112">
-            <a:extLst>
-              <a:ext uri="{FF2B5EF4-FFF2-40B4-BE49-F238E27FC236}">
-                <a16:creationId xmlns:a16="http://schemas.microsoft.com/office/drawing/2014/main" id="{96AC4FAF-E35E-0845-B6D7-B3A13F76472B}"/>
-              </a:ext>
-            </a:extLst>
-          </p:cNvPr>
-          <p:cNvPicPr>
-            <a:picLocks noChangeAspect="1"/>
-          </p:cNvPicPr>
-          <p:nvPr/>
-        </p:nvPicPr>
-        <p:blipFill>
-          <a:blip r:embed="rId19"/>
-          <a:stretch>
-            <a:fillRect/>
-          </a:stretch>
-        </p:blipFill>
-        <p:spPr>
-          <a:xfrm>
-            <a:off x="13299626" y="21509184"/>
-            <a:ext cx="7348149" cy="2926131"/>
-          </a:xfrm>
-          <a:prstGeom prst="rect">
-            <a:avLst/>
-          </a:prstGeom>
-        </p:spPr>
-      </p:pic>
       <p:sp>
         <p:nvSpPr>
           <p:cNvPr id="114" name="Tekstvak 113">
@@ -10285,7 +10563,7 @@
         </p:nvSpPr>
         <p:spPr>
           <a:xfrm>
-            <a:off x="13151665" y="24386954"/>
+            <a:off x="13219041" y="24550584"/>
             <a:ext cx="7122464" cy="338554"/>
           </a:xfrm>
           <a:prstGeom prst="rect">
@@ -10319,138 +10597,42 @@
           </a:p>
         </p:txBody>
       </p:sp>
-      <p:sp>
-        <p:nvSpPr>
-          <p:cNvPr id="115" name="Tekstvak 114">
+      <p:pic>
+        <p:nvPicPr>
+          <p:cNvPr id="2" name="Afbeelding 1" descr="Afbeelding met tekst, diagram, schermopname, Parallel&#10;&#10;Door AI gegenereerde inhoud is mogelijk onjuist.">
             <a:extLst>
               <a:ext uri="{FF2B5EF4-FFF2-40B4-BE49-F238E27FC236}">
-                <a16:creationId xmlns:a16="http://schemas.microsoft.com/office/drawing/2014/main" id="{89097E2C-0F91-F363-441D-F738571EB2A6}"/>
+                <a16:creationId xmlns:a16="http://schemas.microsoft.com/office/drawing/2014/main" id="{79904599-DA35-A146-B988-C725AB0EE6F8}"/>
               </a:ext>
             </a:extLst>
           </p:cNvPr>
-          <p:cNvSpPr txBox="1"/>
+          <p:cNvPicPr>
+            <a:picLocks noChangeAspect="1"/>
+          </p:cNvPicPr>
           <p:nvPr/>
-        </p:nvSpPr>
+        </p:nvPicPr>
+        <p:blipFill>
+          <a:blip r:embed="rId19" cstate="print">
+            <a:extLst>
+              <a:ext uri="{28A0092B-C50C-407E-A947-70E740481C1C}">
+                <a14:useLocalDpi xmlns:a14="http://schemas.microsoft.com/office/drawing/2010/main" val="0"/>
+              </a:ext>
+            </a:extLst>
+          </a:blip>
+          <a:stretch>
+            <a:fillRect/>
+          </a:stretch>
+        </p:blipFill>
         <p:spPr>
           <a:xfrm>
-            <a:off x="4086381" y="22760097"/>
-            <a:ext cx="5874784" cy="2308324"/>
+            <a:off x="13226890" y="21544049"/>
+            <a:ext cx="7477499" cy="3037992"/>
           </a:xfrm>
           <a:prstGeom prst="rect">
             <a:avLst/>
           </a:prstGeom>
         </p:spPr>
-        <p:txBody>
-          <a:bodyPr vert="horz" wrap="square" rtlCol="0">
-            <a:spAutoFit/>
-          </a:bodyPr>
-          <a:lstStyle/>
-          <a:p>
-            <a:pPr marL="342900" indent="-342900">
-              <a:buFont typeface="+mj-lt"/>
-              <a:buAutoNum type="arabicPeriod"/>
-            </a:pPr>
-            <a:r>
-              <a:rPr lang="nl-BE" sz="1800" dirty="0"/>
-              <a:t>weergave van soort node door de kleur,</a:t>
-            </a:r>
-          </a:p>
-          <a:p>
-            <a:pPr marL="342900" indent="-342900">
-              <a:buFont typeface="+mj-lt"/>
-              <a:buAutoNum type="arabicPeriod"/>
-            </a:pPr>
-            <a:r>
-              <a:rPr lang="nl-BE" sz="1800" dirty="0"/>
-              <a:t>aantonen van status van een node door het schildicoon,</a:t>
-            </a:r>
-          </a:p>
-          <a:p>
-            <a:pPr marL="342900" indent="-342900">
-              <a:buFont typeface="+mj-lt"/>
-              <a:buAutoNum type="arabicPeriod"/>
-            </a:pPr>
-            <a:r>
-              <a:rPr lang="nl-BE" sz="1800" dirty="0"/>
-              <a:t>filtering op basis van de status van de node,</a:t>
-            </a:r>
-          </a:p>
-          <a:p>
-            <a:pPr marL="342900" indent="-342900">
-              <a:buFont typeface="+mj-lt"/>
-              <a:buAutoNum type="arabicPeriod"/>
-            </a:pPr>
-            <a:r>
-              <a:rPr lang="nl-BE" sz="1800" dirty="0"/>
-              <a:t>rangschikken op basis van de </a:t>
-            </a:r>
-            <a:r>
-              <a:rPr lang="nl-BE" sz="1800" dirty="0" err="1"/>
-              <a:t>danger</a:t>
-            </a:r>
-            <a:r>
-              <a:rPr lang="nl-BE" sz="1800" dirty="0"/>
-              <a:t> rating,</a:t>
-            </a:r>
-          </a:p>
-          <a:p>
-            <a:pPr marL="342900" indent="-342900">
-              <a:buFont typeface="+mj-lt"/>
-              <a:buAutoNum type="arabicPeriod"/>
-            </a:pPr>
-            <a:r>
-              <a:rPr lang="nl-BE" sz="1800" dirty="0"/>
-              <a:t>highlight van node bij klikken op de node in de filter tab,</a:t>
-            </a:r>
-          </a:p>
-          <a:p>
-            <a:pPr marL="342900" indent="-342900">
-              <a:buFont typeface="+mj-lt"/>
-              <a:buAutoNum type="arabicPeriod"/>
-            </a:pPr>
-            <a:r>
-              <a:rPr lang="nl-BE" sz="1800" dirty="0"/>
-              <a:t>weergeven van aantal </a:t>
-            </a:r>
-            <a:r>
-              <a:rPr lang="nl-BE" sz="1800" dirty="0" err="1"/>
-              <a:t>nodes</a:t>
-            </a:r>
-            <a:r>
-              <a:rPr lang="nl-BE" sz="1800" dirty="0"/>
-              <a:t> per status,</a:t>
-            </a:r>
-          </a:p>
-          <a:p>
-            <a:pPr marL="342900" indent="-342900">
-              <a:buFont typeface="+mj-lt"/>
-              <a:buAutoNum type="arabicPeriod"/>
-            </a:pPr>
-            <a:r>
-              <a:rPr lang="nl-BE" sz="1800" dirty="0"/>
-              <a:t>Samenvatting van root node tot de aangeduide node,</a:t>
-            </a:r>
-          </a:p>
-          <a:p>
-            <a:pPr marL="342900" indent="-342900">
-              <a:buFont typeface="+mj-lt"/>
-              <a:buAutoNum type="arabicPeriod"/>
-            </a:pPr>
-            <a:r>
-              <a:rPr lang="nl-BE" sz="1800" dirty="0"/>
-              <a:t>tooltips bij het </a:t>
-            </a:r>
-            <a:r>
-              <a:rPr lang="nl-BE" sz="1800" dirty="0" err="1"/>
-              <a:t>hoveren</a:t>
-            </a:r>
-            <a:r>
-              <a:rPr lang="nl-BE" sz="1800" dirty="0"/>
-              <a:t>.</a:t>
-            </a:r>
-          </a:p>
-        </p:txBody>
-      </p:sp>
+      </p:pic>
     </p:spTree>
     <p:extLst>
       <p:ext uri="{BB962C8B-B14F-4D97-AF65-F5344CB8AC3E}">

--- a/MP2526_INF_poster_Gielkens.pptx
+++ b/MP2526_INF_poster_Gielkens.pptx
@@ -5859,7 +5859,7 @@
           <a:p>
             <a:fld id="{A5A46936-730D-204E-AB52-3BEB64B90A85}" type="datetimeFigureOut">
               <a:rPr lang="nl-NL" smtClean="0"/>
-              <a:t>18-1-2026</a:t>
+              <a:t>19-1-2026</a:t>
             </a:fld>
             <a:endParaRPr lang="nl-NL"/>
           </a:p>
@@ -6024,7 +6024,7 @@
           <a:p>
             <a:fld id="{97349249-6D1C-0748-B1D9-2AF3A057365D}" type="datetimeFigureOut">
               <a:rPr lang="nl-NL" smtClean="0"/>
-              <a:t>18-1-2026</a:t>
+              <a:t>19-1-2026</a:t>
             </a:fld>
             <a:endParaRPr lang="nl-NL"/>
           </a:p>
@@ -7187,7 +7187,7 @@
           <a:p>
             <a:fld id="{A72B7129-FE34-674B-A2EC-97FC337DE4A7}" type="datetimeFigureOut">
               <a:rPr lang="nl-NL" smtClean="0"/>
-              <a:t>18-1-2026</a:t>
+              <a:t>19-1-2026</a:t>
             </a:fld>
             <a:endParaRPr lang="nl-NL"/>
           </a:p>
@@ -8005,23 +8005,7 @@
                   <a:srgbClr val="E73B2B"/>
                 </a:solidFill>
               </a:rPr>
-              <a:t>fortunately</a:t>
-            </a:r>
-            <a:r>
-              <a:rPr lang="nl-BE" sz="2000" b="1" dirty="0">
-                <a:solidFill>
-                  <a:srgbClr val="E73B2B"/>
-                </a:solidFill>
-              </a:rPr>
-              <a:t>–</a:t>
-            </a:r>
-            <a:r>
-              <a:rPr lang="nl-BE" sz="2000" b="1" dirty="0" err="1">
-                <a:solidFill>
-                  <a:srgbClr val="E73B2B"/>
-                </a:solidFill>
-              </a:rPr>
-              <a:t>unfortunately</a:t>
+              <a:t>fortunately-unfortunately</a:t>
             </a:r>
             <a:r>
               <a:rPr lang="nl-BE" sz="2000" b="1" dirty="0">
@@ -8188,7 +8172,7 @@
                   <a:schemeClr val="tx1"/>
                 </a:solidFill>
               </a:rPr>
-              <a:t>Het onderzoek richt zich op vier kernvragen:</a:t>
+              <a:t>Het onderzoek richt zich op drie kernvragen:</a:t>
             </a:r>
           </a:p>
           <a:p>
@@ -8261,7 +8245,7 @@
                   <a:schemeClr val="tx1"/>
                 </a:solidFill>
               </a:rPr>
-              <a:t>Fortunately-Unfortunately</a:t>
+              <a:t>fortunately-unfortunately</a:t>
             </a:r>
             <a:r>
               <a:rPr lang="nl-BE" sz="2000" dirty="0">
@@ -9027,7 +9011,7 @@
             <a:pPr algn="ctr"/>
             <a:r>
               <a:rPr lang="nl-BE" sz="1600" dirty="0"/>
-              <a:t>Figuur 6: Ingeklapte statusfilter met aantal </a:t>
+              <a:t>Figuur 6: Ingeklapte filter tab met aantal </a:t>
             </a:r>
             <a:r>
               <a:rPr lang="nl-BE" sz="1600" dirty="0" err="1"/>
@@ -9406,7 +9390,7 @@
                   <a:schemeClr val="tx1"/>
                 </a:solidFill>
               </a:rPr>
-              <a:t>Fortunately</a:t>
+              <a:t>fortunately‑unfortunately</a:t>
             </a:r>
             <a:r>
               <a:rPr lang="nl-BE" sz="2000" dirty="0">
@@ -9414,23 +9398,7 @@
                   <a:schemeClr val="tx1"/>
                 </a:solidFill>
               </a:rPr>
-              <a:t>‑</a:t>
-            </a:r>
-            <a:r>
-              <a:rPr lang="nl-BE" sz="2000" dirty="0" err="1">
-                <a:solidFill>
-                  <a:schemeClr val="tx1"/>
-                </a:solidFill>
-              </a:rPr>
-              <a:t>Unfortunately</a:t>
-            </a:r>
-            <a:r>
-              <a:rPr lang="nl-BE" sz="2000" dirty="0">
-                <a:solidFill>
-                  <a:schemeClr val="tx1"/>
-                </a:solidFill>
-              </a:rPr>
-              <a:t>‑trees op te bouwen, maar is onvoldoende voor vlotte, foutarme </a:t>
+              <a:t> trees op te bouwen. Ze is echter onvoldoende voor vlotte, foutarme </a:t>
             </a:r>
             <a:r>
               <a:rPr lang="nl-BE" sz="2000" dirty="0" err="1">
@@ -10138,19 +10106,11 @@
             </a:r>
             <a:r>
               <a:rPr lang="nl-BE" sz="1800" dirty="0" err="1"/>
-              <a:t>Fortunately</a:t>
+              <a:t>fortunately‑unfortunately</a:t>
             </a:r>
             <a:r>
               <a:rPr lang="nl-BE" sz="1800" dirty="0"/>
-              <a:t>‑</a:t>
-            </a:r>
-            <a:r>
-              <a:rPr lang="nl-BE" sz="1800" dirty="0" err="1"/>
-              <a:t>Unfortunately</a:t>
-            </a:r>
-            <a:r>
-              <a:rPr lang="nl-BE" sz="1800" dirty="0"/>
-              <a:t>‑tool leidt tot een </a:t>
+              <a:t> tool leidt tot een </a:t>
             </a:r>
             <a:r>
               <a:rPr lang="nl-BE" sz="1800" b="1" dirty="0">
